--- a/material/Data Analysis/04_numpy(3).pptx
+++ b/material/Data Analysis/04_numpy(3).pptx
@@ -1,6 +1,6 @@
 
 <file path=ppt/presentation.xml><?xml version="1.0" encoding="utf-8"?>
-<p:presentation xmlns:a="http://schemas.openxmlformats.org/drawingml/2006/main" xmlns:r="http://schemas.openxmlformats.org/officeDocument/2006/relationships" xmlns:p="http://schemas.openxmlformats.org/presentationml/2006/main" saveSubsetFonts="1">
+<p:presentation xmlns:a="http://schemas.openxmlformats.org/drawingml/2006/main" xmlns:r="http://schemas.openxmlformats.org/officeDocument/2006/relationships" xmlns:p="http://schemas.openxmlformats.org/presentationml/2006/main" embedTrueTypeFonts="1" saveSubsetFonts="1">
   <p:sldMasterIdLst>
     <p:sldMasterId id="2147483660" r:id="rId1"/>
   </p:sldMasterIdLst>
@@ -48,6 +48,34 @@
   </p:sldIdLst>
   <p:sldSz cx="12192000" cy="6858000"/>
   <p:notesSz cx="6858000" cy="9144000"/>
+  <p:embeddedFontLst>
+    <p:embeddedFont>
+      <p:font typeface="G마켓 산스 TTF Bold" panose="02000000000000000000" pitchFamily="2" charset="-127"/>
+      <p:bold r:id="rId40"/>
+    </p:embeddedFont>
+    <p:embeddedFont>
+      <p:font typeface="Pretendard Black" panose="02000A03000000020004" pitchFamily="2" charset="-127"/>
+      <p:bold r:id="rId41"/>
+    </p:embeddedFont>
+    <p:embeddedFont>
+      <p:font typeface="Pretendard Light" panose="02000403000000020004" pitchFamily="2" charset="-127"/>
+      <p:regular r:id="rId42"/>
+    </p:embeddedFont>
+    <p:embeddedFont>
+      <p:font typeface="Pretendard Medium" panose="02000603000000020004" pitchFamily="2" charset="-127"/>
+      <p:regular r:id="rId43"/>
+    </p:embeddedFont>
+    <p:embeddedFont>
+      <p:font typeface="맑은 고딕" panose="020B0503020000020004" pitchFamily="50" charset="-127"/>
+      <p:regular r:id="rId44"/>
+      <p:bold r:id="rId45"/>
+    </p:embeddedFont>
+    <p:embeddedFont>
+      <p:font typeface="메이플스토리" panose="02000300000000000000" pitchFamily="2" charset="-127"/>
+      <p:regular r:id="rId46"/>
+      <p:bold r:id="rId47"/>
+    </p:embeddedFont>
+  </p:embeddedFontLst>
   <p:defaultTextStyle>
     <a:defPPr>
       <a:defRPr lang="ko-KR"/>
@@ -254,7 +282,7 @@
             <a:fld id="{A13A867C-D490-40C2-AB8D-A60FA70A9BF5}" type="datetimeFigureOut">
               <a:rPr lang="ko-KR" altLang="en-US" smtClean="0"/>
               <a:pPr/>
-              <a:t>2025-08-05</a:t>
+              <a:t>2025-08-21</a:t>
             </a:fld>
             <a:endParaRPr lang="ko-KR" altLang="en-US" dirty="0"/>
           </a:p>
@@ -4256,7 +4284,7 @@
           <a:p>
             <a:fld id="{442BEE3F-2E9A-4FD8-8B8A-8619F3E161C0}" type="datetime1">
               <a:rPr lang="ko-KR" altLang="en-US" smtClean="0"/>
-              <a:t>2025-08-05</a:t>
+              <a:t>2025-08-21</a:t>
             </a:fld>
             <a:endParaRPr lang="ko-KR" altLang="en-US"/>
           </a:p>
@@ -4543,7 +4571,7 @@
           <a:p>
             <a:fld id="{0F78D9C4-20C1-4B15-A116-16DC77AD9A1E}" type="datetime1">
               <a:rPr lang="ko-KR" altLang="en-US" smtClean="0"/>
-              <a:t>2025-08-05</a:t>
+              <a:t>2025-08-21</a:t>
             </a:fld>
             <a:endParaRPr lang="ko-KR" altLang="en-US"/>
           </a:p>
@@ -4718,7 +4746,7 @@
           <a:p>
             <a:fld id="{7F5E23C3-0E3D-4E4E-8486-D7FB4C073DC1}" type="datetime1">
               <a:rPr lang="ko-KR" altLang="en-US" smtClean="0"/>
-              <a:t>2025-08-05</a:t>
+              <a:t>2025-08-21</a:t>
             </a:fld>
             <a:endParaRPr lang="ko-KR" altLang="en-US"/>
           </a:p>
@@ -5047,7 +5075,7 @@
           <a:p>
             <a:fld id="{7F5E23C3-0E3D-4E4E-8486-D7FB4C073DC1}" type="datetime1">
               <a:rPr lang="ko-KR" altLang="en-US" smtClean="0"/>
-              <a:t>2025-08-05</a:t>
+              <a:t>2025-08-21</a:t>
             </a:fld>
             <a:endParaRPr lang="ko-KR" altLang="en-US"/>
           </a:p>
@@ -5853,7 +5881,7 @@
           <a:p>
             <a:fld id="{0F78D9C4-20C1-4B15-A116-16DC77AD9A1E}" type="datetime1">
               <a:rPr lang="ko-KR" altLang="en-US" smtClean="0"/>
-              <a:t>2025-08-05</a:t>
+              <a:t>2025-08-21</a:t>
             </a:fld>
             <a:endParaRPr lang="ko-KR" altLang="en-US" dirty="0"/>
           </a:p>
@@ -6335,7 +6363,7 @@
           <a:p>
             <a:fld id="{0F78D9C4-20C1-4B15-A116-16DC77AD9A1E}" type="datetime1">
               <a:rPr lang="ko-KR" altLang="en-US" smtClean="0"/>
-              <a:t>2025-08-05</a:t>
+              <a:t>2025-08-21</a:t>
             </a:fld>
             <a:endParaRPr lang="ko-KR" altLang="en-US" dirty="0"/>
           </a:p>
@@ -6833,7 +6861,7 @@
           <a:p>
             <a:fld id="{0F78D9C4-20C1-4B15-A116-16DC77AD9A1E}" type="datetime1">
               <a:rPr lang="ko-KR" altLang="en-US" smtClean="0"/>
-              <a:t>2025-08-05</a:t>
+              <a:t>2025-08-21</a:t>
             </a:fld>
             <a:endParaRPr lang="ko-KR" altLang="en-US" dirty="0"/>
           </a:p>
@@ -7406,7 +7434,7 @@
           <a:p>
             <a:fld id="{0F78D9C4-20C1-4B15-A116-16DC77AD9A1E}" type="datetime1">
               <a:rPr lang="ko-KR" altLang="en-US" smtClean="0"/>
-              <a:t>2025-08-05</a:t>
+              <a:t>2025-08-21</a:t>
             </a:fld>
             <a:endParaRPr lang="ko-KR" altLang="en-US" dirty="0"/>
           </a:p>
@@ -8361,7 +8389,7 @@
           <a:p>
             <a:fld id="{0F78D9C4-20C1-4B15-A116-16DC77AD9A1E}" type="datetime1">
               <a:rPr lang="ko-KR" altLang="en-US" smtClean="0"/>
-              <a:t>2025-08-05</a:t>
+              <a:t>2025-08-21</a:t>
             </a:fld>
             <a:endParaRPr lang="ko-KR" altLang="en-US"/>
           </a:p>
@@ -8717,7 +8745,7 @@
           <a:p>
             <a:fld id="{0F78D9C4-20C1-4B15-A116-16DC77AD9A1E}" type="datetime1">
               <a:rPr lang="ko-KR" altLang="en-US" smtClean="0"/>
-              <a:t>2025-08-05</a:t>
+              <a:t>2025-08-21</a:t>
             </a:fld>
             <a:endParaRPr lang="ko-KR" altLang="en-US"/>
           </a:p>
@@ -9065,7 +9093,7 @@
           <a:p>
             <a:fld id="{0F78D9C4-20C1-4B15-A116-16DC77AD9A1E}" type="datetime1">
               <a:rPr lang="ko-KR" altLang="en-US" smtClean="0"/>
-              <a:t>2025-08-05</a:t>
+              <a:t>2025-08-21</a:t>
             </a:fld>
             <a:endParaRPr lang="ko-KR" altLang="en-US"/>
           </a:p>
@@ -9248,7 +9276,7 @@
           <a:p>
             <a:fld id="{0F78D9C4-20C1-4B15-A116-16DC77AD9A1E}" type="datetime1">
               <a:rPr lang="ko-KR" altLang="en-US" smtClean="0"/>
-              <a:t>2025-08-05</a:t>
+              <a:t>2025-08-21</a:t>
             </a:fld>
             <a:endParaRPr lang="ko-KR" altLang="en-US" dirty="0"/>
           </a:p>
@@ -9734,7 +9762,7 @@
           <a:p>
             <a:fld id="{0F78D9C4-20C1-4B15-A116-16DC77AD9A1E}" type="datetime1">
               <a:rPr lang="ko-KR" altLang="en-US" smtClean="0"/>
-              <a:t>2025-08-05</a:t>
+              <a:t>2025-08-21</a:t>
             </a:fld>
             <a:endParaRPr lang="ko-KR" altLang="en-US" dirty="0"/>
           </a:p>
@@ -10452,7 +10480,7 @@
           <a:p>
             <a:fld id="{0F78D9C4-20C1-4B15-A116-16DC77AD9A1E}" type="datetime1">
               <a:rPr lang="ko-KR" altLang="en-US" smtClean="0"/>
-              <a:t>2025-08-05</a:t>
+              <a:t>2025-08-21</a:t>
             </a:fld>
             <a:endParaRPr lang="ko-KR" altLang="en-US" dirty="0"/>
           </a:p>
@@ -10846,7 +10874,7 @@
           <a:p>
             <a:fld id="{0F78D9C4-20C1-4B15-A116-16DC77AD9A1E}" type="datetime1">
               <a:rPr lang="ko-KR" altLang="en-US" smtClean="0"/>
-              <a:t>2025-08-05</a:t>
+              <a:t>2025-08-21</a:t>
             </a:fld>
             <a:endParaRPr lang="ko-KR" altLang="en-US" dirty="0"/>
           </a:p>
@@ -11385,7 +11413,7 @@
           <a:p>
             <a:fld id="{0F78D9C4-20C1-4B15-A116-16DC77AD9A1E}" type="datetime1">
               <a:rPr lang="ko-KR" altLang="en-US" smtClean="0"/>
-              <a:t>2025-08-05</a:t>
+              <a:t>2025-08-21</a:t>
             </a:fld>
             <a:endParaRPr lang="ko-KR" altLang="en-US" dirty="0"/>
           </a:p>
@@ -11824,7 +11852,7 @@
           <a:p>
             <a:fld id="{0F78D9C4-20C1-4B15-A116-16DC77AD9A1E}" type="datetime1">
               <a:rPr lang="ko-KR" altLang="en-US" smtClean="0"/>
-              <a:t>2025-08-05</a:t>
+              <a:t>2025-08-21</a:t>
             </a:fld>
             <a:endParaRPr lang="ko-KR" altLang="en-US" dirty="0"/>
           </a:p>
@@ -12475,7 +12503,7 @@
           <a:p>
             <a:fld id="{0F78D9C4-20C1-4B15-A116-16DC77AD9A1E}" type="datetime1">
               <a:rPr lang="ko-KR" altLang="en-US" smtClean="0"/>
-              <a:t>2025-08-05</a:t>
+              <a:t>2025-08-21</a:t>
             </a:fld>
             <a:endParaRPr lang="ko-KR" altLang="en-US" dirty="0"/>
           </a:p>
@@ -12936,7 +12964,7 @@
           <a:p>
             <a:fld id="{0F78D9C4-20C1-4B15-A116-16DC77AD9A1E}" type="datetime1">
               <a:rPr lang="ko-KR" altLang="en-US" smtClean="0"/>
-              <a:t>2025-08-05</a:t>
+              <a:t>2025-08-21</a:t>
             </a:fld>
             <a:endParaRPr lang="ko-KR" altLang="en-US" dirty="0"/>
           </a:p>
@@ -13365,7 +13393,7 @@
           <a:p>
             <a:fld id="{0F78D9C4-20C1-4B15-A116-16DC77AD9A1E}" type="datetime1">
               <a:rPr lang="ko-KR" altLang="en-US" smtClean="0"/>
-              <a:t>2025-08-05</a:t>
+              <a:t>2025-08-21</a:t>
             </a:fld>
             <a:endParaRPr lang="ko-KR" altLang="en-US" dirty="0"/>
           </a:p>
@@ -14212,7 +14240,7 @@
           <a:p>
             <a:fld id="{0F78D9C4-20C1-4B15-A116-16DC77AD9A1E}" type="datetime1">
               <a:rPr lang="ko-KR" altLang="en-US" smtClean="0"/>
-              <a:t>2025-08-05</a:t>
+              <a:t>2025-08-21</a:t>
             </a:fld>
             <a:endParaRPr lang="ko-KR" altLang="en-US"/>
           </a:p>
@@ -14600,7 +14628,7 @@
           <a:p>
             <a:fld id="{0F78D9C4-20C1-4B15-A116-16DC77AD9A1E}" type="datetime1">
               <a:rPr lang="ko-KR" altLang="en-US" smtClean="0"/>
-              <a:t>2025-08-05</a:t>
+              <a:t>2025-08-21</a:t>
             </a:fld>
             <a:endParaRPr lang="ko-KR" altLang="en-US"/>
           </a:p>
@@ -14912,7 +14940,7 @@
           <a:p>
             <a:fld id="{0F78D9C4-20C1-4B15-A116-16DC77AD9A1E}" type="datetime1">
               <a:rPr lang="ko-KR" altLang="en-US" smtClean="0"/>
-              <a:t>2025-08-05</a:t>
+              <a:t>2025-08-21</a:t>
             </a:fld>
             <a:endParaRPr lang="ko-KR" altLang="en-US" dirty="0"/>
           </a:p>
@@ -15377,7 +15405,7 @@
           <a:p>
             <a:fld id="{0F78D9C4-20C1-4B15-A116-16DC77AD9A1E}" type="datetime1">
               <a:rPr lang="ko-KR" altLang="en-US" smtClean="0"/>
-              <a:t>2025-08-05</a:t>
+              <a:t>2025-08-21</a:t>
             </a:fld>
             <a:endParaRPr lang="ko-KR" altLang="en-US" dirty="0"/>
           </a:p>
@@ -15826,7 +15854,7 @@
           <a:p>
             <a:fld id="{0F78D9C4-20C1-4B15-A116-16DC77AD9A1E}" type="datetime1">
               <a:rPr lang="ko-KR" altLang="en-US" smtClean="0"/>
-              <a:t>2025-08-05</a:t>
+              <a:t>2025-08-21</a:t>
             </a:fld>
             <a:endParaRPr lang="ko-KR" altLang="en-US" dirty="0"/>
           </a:p>
@@ -16276,7 +16304,7 @@
           <a:p>
             <a:fld id="{0F78D9C4-20C1-4B15-A116-16DC77AD9A1E}" type="datetime1">
               <a:rPr lang="ko-KR" altLang="en-US" smtClean="0"/>
-              <a:t>2025-08-05</a:t>
+              <a:t>2025-08-21</a:t>
             </a:fld>
             <a:endParaRPr lang="ko-KR" altLang="en-US" dirty="0"/>
           </a:p>
@@ -16625,7 +16653,7 @@
           <a:p>
             <a:fld id="{0F78D9C4-20C1-4B15-A116-16DC77AD9A1E}" type="datetime1">
               <a:rPr lang="ko-KR" altLang="en-US" smtClean="0"/>
-              <a:t>2025-08-05</a:t>
+              <a:t>2025-08-21</a:t>
             </a:fld>
             <a:endParaRPr lang="ko-KR" altLang="en-US" dirty="0"/>
           </a:p>
@@ -17291,7 +17319,7 @@
           <a:p>
             <a:fld id="{0F78D9C4-20C1-4B15-A116-16DC77AD9A1E}" type="datetime1">
               <a:rPr lang="ko-KR" altLang="en-US" smtClean="0"/>
-              <a:t>2025-08-05</a:t>
+              <a:t>2025-08-21</a:t>
             </a:fld>
             <a:endParaRPr lang="ko-KR" altLang="en-US"/>
           </a:p>
@@ -17605,7 +17633,7 @@
           <a:p>
             <a:fld id="{0F78D9C4-20C1-4B15-A116-16DC77AD9A1E}" type="datetime1">
               <a:rPr lang="ko-KR" altLang="en-US" smtClean="0"/>
-              <a:t>2025-08-05</a:t>
+              <a:t>2025-08-21</a:t>
             </a:fld>
             <a:endParaRPr lang="ko-KR" altLang="en-US"/>
           </a:p>
@@ -17794,7 +17822,7 @@
           <a:p>
             <a:fld id="{0F78D9C4-20C1-4B15-A116-16DC77AD9A1E}" type="datetime1">
               <a:rPr lang="ko-KR" altLang="en-US" smtClean="0"/>
-              <a:t>2025-08-05</a:t>
+              <a:t>2025-08-21</a:t>
             </a:fld>
             <a:endParaRPr lang="ko-KR" altLang="en-US" dirty="0"/>
           </a:p>
@@ -18256,7 +18284,7 @@
           <a:p>
             <a:fld id="{0F78D9C4-20C1-4B15-A116-16DC77AD9A1E}" type="datetime1">
               <a:rPr lang="ko-KR" altLang="en-US" smtClean="0"/>
-              <a:t>2025-08-05</a:t>
+              <a:t>2025-08-21</a:t>
             </a:fld>
             <a:endParaRPr lang="ko-KR" altLang="en-US" dirty="0"/>
           </a:p>
@@ -18973,7 +19001,7 @@
           <a:p>
             <a:fld id="{0F78D9C4-20C1-4B15-A116-16DC77AD9A1E}" type="datetime1">
               <a:rPr lang="ko-KR" altLang="en-US" smtClean="0"/>
-              <a:t>2025-08-05</a:t>
+              <a:t>2025-08-21</a:t>
             </a:fld>
             <a:endParaRPr lang="ko-KR" altLang="en-US" dirty="0"/>
           </a:p>
@@ -19669,7 +19697,7 @@
           <a:p>
             <a:fld id="{0F78D9C4-20C1-4B15-A116-16DC77AD9A1E}" type="datetime1">
               <a:rPr lang="ko-KR" altLang="en-US" smtClean="0"/>
-              <a:t>2025-08-05</a:t>
+              <a:t>2025-08-21</a:t>
             </a:fld>
             <a:endParaRPr lang="ko-KR" altLang="en-US" dirty="0"/>
           </a:p>
@@ -20366,7 +20394,7 @@
           <a:p>
             <a:fld id="{0F78D9C4-20C1-4B15-A116-16DC77AD9A1E}" type="datetime1">
               <a:rPr lang="ko-KR" altLang="en-US" smtClean="0"/>
-              <a:t>2025-08-05</a:t>
+              <a:t>2025-08-21</a:t>
             </a:fld>
             <a:endParaRPr lang="ko-KR" altLang="en-US" dirty="0"/>
           </a:p>
@@ -20831,7 +20859,7 @@
           <a:p>
             <a:fld id="{0F78D9C4-20C1-4B15-A116-16DC77AD9A1E}" type="datetime1">
               <a:rPr lang="ko-KR" altLang="en-US" smtClean="0"/>
-              <a:t>2025-08-05</a:t>
+              <a:t>2025-08-21</a:t>
             </a:fld>
             <a:endParaRPr lang="ko-KR" altLang="en-US" dirty="0"/>
           </a:p>
